--- a/클라우드네이티브.pptx
+++ b/클라우드네이티브.pptx
@@ -264,7 +264,7 @@
           <a:p>
             <a:fld id="{00A7BD22-C8EB-4173-A227-EB4225261623}" type="datetimeFigureOut">
               <a:rPr lang="ko-KR" altLang="en-US" smtClean="0"/>
-              <a:t>2026-08-02</a:t>
+              <a:t>2026-08-03</a:t>
             </a:fld>
             <a:endParaRPr lang="ko-KR" altLang="en-US"/>
           </a:p>
@@ -434,7 +434,7 @@
           <a:p>
             <a:fld id="{00A7BD22-C8EB-4173-A227-EB4225261623}" type="datetimeFigureOut">
               <a:rPr lang="ko-KR" altLang="en-US" smtClean="0"/>
-              <a:t>2026-08-02</a:t>
+              <a:t>2026-08-03</a:t>
             </a:fld>
             <a:endParaRPr lang="ko-KR" altLang="en-US"/>
           </a:p>
@@ -614,7 +614,7 @@
           <a:p>
             <a:fld id="{00A7BD22-C8EB-4173-A227-EB4225261623}" type="datetimeFigureOut">
               <a:rPr lang="ko-KR" altLang="en-US" smtClean="0"/>
-              <a:t>2026-08-02</a:t>
+              <a:t>2026-08-03</a:t>
             </a:fld>
             <a:endParaRPr lang="ko-KR" altLang="en-US"/>
           </a:p>
@@ -784,7 +784,7 @@
           <a:p>
             <a:fld id="{00A7BD22-C8EB-4173-A227-EB4225261623}" type="datetimeFigureOut">
               <a:rPr lang="ko-KR" altLang="en-US" smtClean="0"/>
-              <a:t>2026-08-02</a:t>
+              <a:t>2026-08-03</a:t>
             </a:fld>
             <a:endParaRPr lang="ko-KR" altLang="en-US"/>
           </a:p>
@@ -1030,7 +1030,7 @@
           <a:p>
             <a:fld id="{00A7BD22-C8EB-4173-A227-EB4225261623}" type="datetimeFigureOut">
               <a:rPr lang="ko-KR" altLang="en-US" smtClean="0"/>
-              <a:t>2026-08-02</a:t>
+              <a:t>2026-08-03</a:t>
             </a:fld>
             <a:endParaRPr lang="ko-KR" altLang="en-US"/>
           </a:p>
@@ -1262,7 +1262,7 @@
           <a:p>
             <a:fld id="{00A7BD22-C8EB-4173-A227-EB4225261623}" type="datetimeFigureOut">
               <a:rPr lang="ko-KR" altLang="en-US" smtClean="0"/>
-              <a:t>2026-08-02</a:t>
+              <a:t>2026-08-03</a:t>
             </a:fld>
             <a:endParaRPr lang="ko-KR" altLang="en-US"/>
           </a:p>
@@ -1629,7 +1629,7 @@
           <a:p>
             <a:fld id="{00A7BD22-C8EB-4173-A227-EB4225261623}" type="datetimeFigureOut">
               <a:rPr lang="ko-KR" altLang="en-US" smtClean="0"/>
-              <a:t>2026-08-02</a:t>
+              <a:t>2026-08-03</a:t>
             </a:fld>
             <a:endParaRPr lang="ko-KR" altLang="en-US"/>
           </a:p>
@@ -1747,7 +1747,7 @@
           <a:p>
             <a:fld id="{00A7BD22-C8EB-4173-A227-EB4225261623}" type="datetimeFigureOut">
               <a:rPr lang="ko-KR" altLang="en-US" smtClean="0"/>
-              <a:t>2026-08-02</a:t>
+              <a:t>2026-08-03</a:t>
             </a:fld>
             <a:endParaRPr lang="ko-KR" altLang="en-US"/>
           </a:p>
@@ -1842,7 +1842,7 @@
           <a:p>
             <a:fld id="{00A7BD22-C8EB-4173-A227-EB4225261623}" type="datetimeFigureOut">
               <a:rPr lang="ko-KR" altLang="en-US" smtClean="0"/>
-              <a:t>2026-08-02</a:t>
+              <a:t>2026-08-03</a:t>
             </a:fld>
             <a:endParaRPr lang="ko-KR" altLang="en-US"/>
           </a:p>
@@ -2119,7 +2119,7 @@
           <a:p>
             <a:fld id="{00A7BD22-C8EB-4173-A227-EB4225261623}" type="datetimeFigureOut">
               <a:rPr lang="ko-KR" altLang="en-US" smtClean="0"/>
-              <a:t>2026-08-02</a:t>
+              <a:t>2026-08-03</a:t>
             </a:fld>
             <a:endParaRPr lang="ko-KR" altLang="en-US"/>
           </a:p>
@@ -2372,7 +2372,7 @@
           <a:p>
             <a:fld id="{00A7BD22-C8EB-4173-A227-EB4225261623}" type="datetimeFigureOut">
               <a:rPr lang="ko-KR" altLang="en-US" smtClean="0"/>
-              <a:t>2026-08-02</a:t>
+              <a:t>2026-08-03</a:t>
             </a:fld>
             <a:endParaRPr lang="ko-KR" altLang="en-US"/>
           </a:p>
@@ -2585,7 +2585,7 @@
           <a:p>
             <a:fld id="{00A7BD22-C8EB-4173-A227-EB4225261623}" type="datetimeFigureOut">
               <a:rPr lang="ko-KR" altLang="en-US" smtClean="0"/>
-              <a:t>2026-08-02</a:t>
+              <a:t>2026-08-03</a:t>
             </a:fld>
             <a:endParaRPr lang="ko-KR" altLang="en-US"/>
           </a:p>
@@ -3308,15 +3308,7 @@
             </a:r>
             <a:r>
               <a:rPr lang="en-US" altLang="ko-KR" sz="1000" dirty="0" smtClean="0"/>
-              <a:t>256 </a:t>
-            </a:r>
-            <a:r>
-              <a:rPr lang="en-US" altLang="ko-KR" sz="1000" dirty="0" smtClean="0"/>
-              <a:t>M</a:t>
-            </a:r>
-            <a:r>
-              <a:rPr lang="en-US" altLang="ko-KR" sz="1000" dirty="0" smtClean="0"/>
-              <a:t>B</a:t>
+              <a:t>256 MB</a:t>
             </a:r>
           </a:p>
           <a:p>
@@ -4712,15 +4704,7 @@
             </a:r>
             <a:r>
               <a:rPr lang="en-US" altLang="ko-KR" sz="1000" dirty="0" smtClean="0"/>
-              <a:t>256 </a:t>
-            </a:r>
-            <a:r>
-              <a:rPr lang="en-US" altLang="ko-KR" sz="1000" dirty="0" smtClean="0"/>
-              <a:t>M</a:t>
-            </a:r>
-            <a:r>
-              <a:rPr lang="en-US" altLang="ko-KR" sz="1000" dirty="0" smtClean="0"/>
-              <a:t>B</a:t>
+              <a:t>256 MB</a:t>
             </a:r>
           </a:p>
           <a:p>
@@ -5983,7 +5967,6 @@
               <a:rPr lang="en-US" altLang="ko-KR" sz="2300" b="1" dirty="0" smtClean="0"/>
               <a:t> (DevOps)</a:t>
             </a:r>
-            <a:endParaRPr lang="en-US" altLang="ko-KR" sz="2300" b="1" dirty="0" smtClean="0"/>
           </a:p>
         </p:txBody>
       </p:sp>
@@ -6708,7 +6691,6 @@
               <a:rPr lang="en-US" altLang="ko-KR" sz="2300" b="1" dirty="0" smtClean="0"/>
               <a:t>CI / CD</a:t>
             </a:r>
-            <a:endParaRPr lang="en-US" altLang="ko-KR" sz="2300" b="1" dirty="0" smtClean="0"/>
           </a:p>
         </p:txBody>
       </p:sp>
@@ -7134,15 +7116,7 @@
                   <a:schemeClr val="tx1"/>
                 </a:solidFill>
               </a:rPr>
-              <a:t>테스</a:t>
-            </a:r>
-            <a:r>
-              <a:rPr lang="ko-KR" altLang="en-US" sz="1500" dirty="0" smtClean="0">
-                <a:solidFill>
-                  <a:schemeClr val="tx1"/>
-                </a:solidFill>
-              </a:rPr>
-              <a:t>트</a:t>
+              <a:t>테스트</a:t>
             </a:r>
             <a:endParaRPr lang="ko-KR" altLang="en-US" sz="1500" dirty="0">
               <a:solidFill>
@@ -7874,15 +7848,7 @@
                   <a:schemeClr val="bg1"/>
                 </a:solidFill>
               </a:rPr>
-              <a:t>테스</a:t>
-            </a:r>
-            <a:r>
-              <a:rPr lang="ko-KR" altLang="en-US" sz="1500" b="1" dirty="0" smtClean="0">
-                <a:solidFill>
-                  <a:schemeClr val="bg1"/>
-                </a:solidFill>
-              </a:rPr>
-              <a:t>트</a:t>
+              <a:t>테스트</a:t>
             </a:r>
             <a:r>
               <a:rPr lang="ko-KR" altLang="en-US" sz="1200" b="1" dirty="0" smtClean="0">
@@ -10291,7 +10257,6 @@
               <a:rPr lang="en-US" altLang="ko-KR" sz="1500" b="1" dirty="0" smtClean="0"/>
               <a:t>)</a:t>
             </a:r>
-            <a:endParaRPr lang="en-US" altLang="ko-KR" sz="1500" b="1" dirty="0" smtClean="0"/>
           </a:p>
         </p:txBody>
       </p:sp>
@@ -10959,15 +10924,7 @@
                   <a:schemeClr val="bg1"/>
                 </a:solidFill>
               </a:rPr>
-              <a:t>테스</a:t>
-            </a:r>
-            <a:r>
-              <a:rPr lang="ko-KR" altLang="en-US" sz="1500" b="1" dirty="0" smtClean="0">
-                <a:solidFill>
-                  <a:schemeClr val="bg1"/>
-                </a:solidFill>
-              </a:rPr>
-              <a:t>트</a:t>
+              <a:t>테스트</a:t>
             </a:r>
             <a:r>
               <a:rPr lang="ko-KR" altLang="en-US" sz="1200" b="1" dirty="0" smtClean="0">
@@ -12290,11 +12247,7 @@
             </a:r>
             <a:r>
               <a:rPr lang="ko-KR" altLang="en-US" dirty="0" smtClean="0"/>
-              <a:t>심각한 </a:t>
-            </a:r>
-            <a:r>
-              <a:rPr lang="ko-KR" altLang="en-US" dirty="0" smtClean="0"/>
-              <a:t>램</a:t>
+              <a:t>심각한 램</a:t>
             </a:r>
             <a:r>
               <a:rPr lang="en-US" altLang="ko-KR" dirty="0" smtClean="0"/>
@@ -12465,11 +12418,6 @@
               </a:rPr>
               <a:t>?</a:t>
             </a:r>
-            <a:endParaRPr lang="en-US" altLang="ko-KR" b="1" dirty="0" smtClean="0">
-              <a:solidFill>
-                <a:schemeClr val="tx1"/>
-              </a:solidFill>
-            </a:endParaRPr>
           </a:p>
         </p:txBody>
       </p:sp>
@@ -12617,7 +12565,6 @@
               <a:rPr lang="en-US" altLang="ko-KR" sz="1500" b="1" dirty="0" smtClean="0"/>
               <a:t>HPA</a:t>
             </a:r>
-            <a:endParaRPr lang="en-US" altLang="ko-KR" sz="1500" b="1" dirty="0" smtClean="0"/>
           </a:p>
         </p:txBody>
       </p:sp>
@@ -12712,11 +12659,6 @@
               </a:rPr>
               <a:t>?</a:t>
             </a:r>
-            <a:endParaRPr lang="en-US" altLang="ko-KR" b="1" dirty="0" smtClean="0">
-              <a:solidFill>
-                <a:schemeClr val="tx1"/>
-              </a:solidFill>
-            </a:endParaRPr>
           </a:p>
         </p:txBody>
       </p:sp>
@@ -13597,15 +13539,7 @@
             </a:r>
             <a:r>
               <a:rPr lang="en-US" altLang="ko-KR" sz="1000" dirty="0" smtClean="0"/>
-              <a:t>256 </a:t>
-            </a:r>
-            <a:r>
-              <a:rPr lang="en-US" altLang="ko-KR" sz="1000" dirty="0" smtClean="0"/>
-              <a:t>M</a:t>
-            </a:r>
-            <a:r>
-              <a:rPr lang="en-US" altLang="ko-KR" sz="1000" dirty="0" smtClean="0"/>
-              <a:t>B</a:t>
+              <a:t>256 MB</a:t>
             </a:r>
           </a:p>
           <a:p>
@@ -14876,7 +14810,6 @@
               <a:rPr lang="en-US" altLang="ko-KR" sz="2300" b="1" dirty="0" smtClean="0"/>
               <a:t>1MSA)</a:t>
             </a:r>
-            <a:endParaRPr lang="en-US" altLang="ko-KR" sz="2300" b="1" dirty="0" smtClean="0"/>
           </a:p>
         </p:txBody>
       </p:sp>
@@ -16144,11 +16077,7 @@
             <a:pPr algn="ctr"/>
             <a:r>
               <a:rPr lang="ko-KR" altLang="en-US" sz="1200" b="1" dirty="0" err="1" smtClean="0"/>
-              <a:t>서버</a:t>
-            </a:r>
-            <a:r>
-              <a:rPr lang="ko-KR" altLang="en-US" sz="1200" b="1" dirty="0" err="1" smtClean="0"/>
-              <a:t>실</a:t>
+              <a:t>서버실</a:t>
             </a:r>
             <a:endParaRPr lang="en-US" altLang="ko-KR" sz="1200" b="1" dirty="0" smtClean="0"/>
           </a:p>
@@ -16201,11 +16130,7 @@
             <a:pPr algn="ctr"/>
             <a:r>
               <a:rPr lang="ko-KR" altLang="en-US" sz="1200" b="1" dirty="0" err="1" smtClean="0"/>
-              <a:t>서버</a:t>
-            </a:r>
-            <a:r>
-              <a:rPr lang="ko-KR" altLang="en-US" sz="1200" b="1" dirty="0" err="1" smtClean="0"/>
-              <a:t>실</a:t>
+              <a:t>서버실</a:t>
             </a:r>
             <a:endParaRPr lang="en-US" altLang="ko-KR" sz="1200" b="1" dirty="0" smtClean="0"/>
           </a:p>
@@ -16258,11 +16183,7 @@
             <a:pPr algn="ctr"/>
             <a:r>
               <a:rPr lang="ko-KR" altLang="en-US" sz="1200" b="1" dirty="0" err="1" smtClean="0"/>
-              <a:t>서버</a:t>
-            </a:r>
-            <a:r>
-              <a:rPr lang="ko-KR" altLang="en-US" sz="1200" b="1" dirty="0" err="1" smtClean="0"/>
-              <a:t>실</a:t>
+              <a:t>서버실</a:t>
             </a:r>
             <a:endParaRPr lang="en-US" altLang="ko-KR" sz="1200" b="1" dirty="0" smtClean="0"/>
           </a:p>
@@ -16315,11 +16236,7 @@
             <a:pPr algn="ctr"/>
             <a:r>
               <a:rPr lang="ko-KR" altLang="en-US" sz="1200" b="1" dirty="0" err="1" smtClean="0"/>
-              <a:t>서버</a:t>
-            </a:r>
-            <a:r>
-              <a:rPr lang="ko-KR" altLang="en-US" sz="1200" b="1" dirty="0" err="1" smtClean="0"/>
-              <a:t>실</a:t>
+              <a:t>서버실</a:t>
             </a:r>
             <a:endParaRPr lang="en-US" altLang="ko-KR" sz="1200" b="1" dirty="0" smtClean="0"/>
           </a:p>
@@ -18121,8 +18038,8 @@
         </p:nvSpPr>
         <p:spPr>
           <a:xfrm>
-            <a:off x="706590" y="631678"/>
-            <a:ext cx="570797" cy="1268054"/>
+            <a:off x="706590" y="121917"/>
+            <a:ext cx="570797" cy="1471749"/>
           </a:xfrm>
           <a:prstGeom prst="rect">
             <a:avLst/>
@@ -18171,7 +18088,7 @@
         </p:nvSpPr>
         <p:spPr>
           <a:xfrm>
-            <a:off x="1345267" y="707137"/>
+            <a:off x="1345267" y="306541"/>
             <a:ext cx="224442" cy="191193"/>
           </a:xfrm>
           <a:prstGeom prst="rightArrow">
@@ -18211,7 +18128,7 @@
         </p:nvSpPr>
         <p:spPr>
           <a:xfrm>
-            <a:off x="1615396" y="591025"/>
+            <a:off x="1615396" y="190429"/>
             <a:ext cx="1778912" cy="410586"/>
           </a:xfrm>
           <a:prstGeom prst="rect">
@@ -18257,7 +18174,6 @@
               <a:rPr lang="en-US" altLang="ko-KR" sz="1500" b="1" dirty="0" smtClean="0"/>
               <a:t>(VM)</a:t>
             </a:r>
-            <a:endParaRPr lang="en-US" altLang="ko-KR" sz="1500" b="1" dirty="0" smtClean="0"/>
           </a:p>
         </p:txBody>
       </p:sp>
@@ -18269,7 +18185,7 @@
         </p:nvSpPr>
         <p:spPr>
           <a:xfrm>
-            <a:off x="1345267" y="1598842"/>
+            <a:off x="1345267" y="1198246"/>
             <a:ext cx="224442" cy="191193"/>
           </a:xfrm>
           <a:prstGeom prst="rightArrow">
@@ -18309,7 +18225,7 @@
         </p:nvSpPr>
         <p:spPr>
           <a:xfrm>
-            <a:off x="1615396" y="1485647"/>
+            <a:off x="1615396" y="1085051"/>
             <a:ext cx="1778912" cy="410586"/>
           </a:xfrm>
           <a:prstGeom prst="rect">
@@ -18440,7 +18356,6 @@
               <a:rPr lang="en-US" altLang="ko-KR" sz="1100" b="1" dirty="0" smtClean="0"/>
               <a:t>PC</a:t>
             </a:r>
-            <a:endParaRPr lang="en-US" altLang="ko-KR" sz="1100" b="1" dirty="0" smtClean="0"/>
           </a:p>
         </p:txBody>
       </p:sp>
@@ -18500,7 +18415,7 @@
         </p:nvSpPr>
         <p:spPr>
           <a:xfrm>
-            <a:off x="3331930" y="641150"/>
+            <a:off x="3331930" y="240554"/>
             <a:ext cx="2044932" cy="323165"/>
           </a:xfrm>
           <a:prstGeom prst="rect">
@@ -18550,7 +18465,7 @@
         </p:nvSpPr>
         <p:spPr>
           <a:xfrm>
-            <a:off x="3331930" y="1530873"/>
+            <a:off x="3331930" y="1130277"/>
             <a:ext cx="2044932" cy="323165"/>
           </a:xfrm>
           <a:prstGeom prst="rect">
@@ -18699,7 +18614,6 @@
               <a:rPr lang="en-US" altLang="ko-KR" sz="1100" b="1" dirty="0" smtClean="0"/>
               <a:t>PC</a:t>
             </a:r>
-            <a:endParaRPr lang="en-US" altLang="ko-KR" sz="1100" b="1" dirty="0" smtClean="0"/>
           </a:p>
         </p:txBody>
       </p:sp>
@@ -18866,7 +18780,6 @@
               <a:rPr lang="en-US" altLang="ko-KR" sz="1100" b="1" dirty="0" smtClean="0"/>
               <a:t>PC</a:t>
             </a:r>
-            <a:endParaRPr lang="en-US" altLang="ko-KR" sz="1100" b="1" dirty="0" smtClean="0"/>
           </a:p>
         </p:txBody>
       </p:sp>
@@ -18986,7 +18899,6 @@
               <a:rPr lang="ko-KR" altLang="en-US" dirty="0"/>
               <a:t>명</a:t>
             </a:r>
-            <a:endParaRPr lang="ko-KR" altLang="en-US" dirty="0"/>
           </a:p>
         </p:txBody>
       </p:sp>
@@ -19071,7 +18983,6 @@
               <a:rPr lang="en-US" altLang="ko-KR" sz="1100" b="1" dirty="0" smtClean="0"/>
               <a:t>PC</a:t>
             </a:r>
-            <a:endParaRPr lang="en-US" altLang="ko-KR" sz="1100" b="1" dirty="0" smtClean="0"/>
           </a:p>
         </p:txBody>
       </p:sp>
@@ -19156,7 +19067,6 @@
               <a:rPr lang="en-US" altLang="ko-KR" sz="1100" b="1" dirty="0" smtClean="0"/>
               <a:t>PC</a:t>
             </a:r>
-            <a:endParaRPr lang="en-US" altLang="ko-KR" sz="1100" b="1" dirty="0" smtClean="0"/>
           </a:p>
         </p:txBody>
       </p:sp>
@@ -19241,7 +19151,6 @@
               <a:rPr lang="en-US" altLang="ko-KR" sz="1100" b="1" dirty="0" smtClean="0"/>
               <a:t>PC</a:t>
             </a:r>
-            <a:endParaRPr lang="en-US" altLang="ko-KR" sz="1100" b="1" dirty="0" smtClean="0"/>
           </a:p>
         </p:txBody>
       </p:sp>
@@ -19279,7 +19188,6 @@
               <a:rPr lang="ko-KR" altLang="en-US" dirty="0"/>
               <a:t>명</a:t>
             </a:r>
-            <a:endParaRPr lang="ko-KR" altLang="en-US" dirty="0"/>
           </a:p>
         </p:txBody>
       </p:sp>
@@ -19386,8 +19294,8 @@
         </p:nvCxnSpPr>
         <p:spPr>
           <a:xfrm>
-            <a:off x="4674215" y="2186247"/>
-            <a:ext cx="90457" cy="4671753"/>
+            <a:off x="4746171" y="1593666"/>
+            <a:ext cx="18501" cy="5264334"/>
           </a:xfrm>
           <a:prstGeom prst="line">
             <a:avLst/>
@@ -19416,6 +19324,120 @@
           </a:fontRef>
         </p:style>
       </p:cxnSp>
+      <p:cxnSp>
+        <p:nvCxnSpPr>
+          <p:cNvPr id="36" name="직선 화살표 연결선 35"/>
+          <p:cNvCxnSpPr>
+            <a:endCxn id="43" idx="0"/>
+          </p:cNvCxnSpPr>
+          <p:nvPr/>
+        </p:nvCxnSpPr>
+        <p:spPr>
+          <a:xfrm>
+            <a:off x="5278461" y="497734"/>
+            <a:ext cx="5199712" cy="2968673"/>
+          </a:xfrm>
+          <a:prstGeom prst="straightConnector1">
+            <a:avLst/>
+          </a:prstGeom>
+          <a:ln w="28575">
+            <a:solidFill>
+              <a:srgbClr val="00B0F0"/>
+            </a:solidFill>
+            <a:tailEnd type="triangle"/>
+          </a:ln>
+        </p:spPr>
+        <p:style>
+          <a:lnRef idx="1">
+            <a:schemeClr val="accent1"/>
+          </a:lnRef>
+          <a:fillRef idx="0">
+            <a:schemeClr val="accent1"/>
+          </a:fillRef>
+          <a:effectRef idx="0">
+            <a:schemeClr val="accent1"/>
+          </a:effectRef>
+          <a:fontRef idx="minor">
+            <a:schemeClr val="tx1"/>
+          </a:fontRef>
+        </p:style>
+      </p:cxnSp>
+      <p:sp>
+        <p:nvSpPr>
+          <p:cNvPr id="39" name="TextBox 38"/>
+          <p:cNvSpPr txBox="1"/>
+          <p:nvPr/>
+        </p:nvSpPr>
+        <p:spPr>
+          <a:xfrm>
+            <a:off x="7464147" y="1463970"/>
+            <a:ext cx="1453430" cy="323165"/>
+          </a:xfrm>
+          <a:prstGeom prst="rect">
+            <a:avLst/>
+          </a:prstGeom>
+          <a:noFill/>
+        </p:spPr>
+        <p:txBody>
+          <a:bodyPr wrap="square" rtlCol="0">
+            <a:spAutoFit/>
+          </a:bodyPr>
+          <a:lstStyle/>
+          <a:p>
+            <a:r>
+              <a:rPr lang="ko-KR" altLang="en-US" sz="1500" b="1" dirty="0" err="1" smtClean="0"/>
+              <a:t>클라우드</a:t>
+            </a:r>
+            <a:r>
+              <a:rPr lang="ko-KR" altLang="en-US" sz="1500" b="1" dirty="0" smtClean="0"/>
+              <a:t> 전환</a:t>
+            </a:r>
+            <a:endParaRPr lang="ko-KR" altLang="en-US" sz="1500" b="1" dirty="0"/>
+          </a:p>
+        </p:txBody>
+      </p:sp>
+      <p:sp>
+        <p:nvSpPr>
+          <p:cNvPr id="40" name="TextBox 39"/>
+          <p:cNvSpPr txBox="1"/>
+          <p:nvPr/>
+        </p:nvSpPr>
+        <p:spPr>
+          <a:xfrm>
+            <a:off x="869739" y="2152313"/>
+            <a:ext cx="2056616" cy="446276"/>
+          </a:xfrm>
+          <a:prstGeom prst="rect">
+            <a:avLst/>
+          </a:prstGeom>
+          <a:noFill/>
+        </p:spPr>
+        <p:txBody>
+          <a:bodyPr wrap="square" rtlCol="0">
+            <a:spAutoFit/>
+          </a:bodyPr>
+          <a:lstStyle/>
+          <a:p>
+            <a:r>
+              <a:rPr lang="ko-KR" altLang="en-US" sz="2300" b="1" dirty="0" smtClean="0"/>
+              <a:t>기존 </a:t>
+            </a:r>
+            <a:r>
+              <a:rPr lang="en-US" altLang="ko-KR" sz="2300" b="1" dirty="0" smtClean="0"/>
+              <a:t>(2015</a:t>
+            </a:r>
+            <a:r>
+              <a:rPr lang="ko-KR" altLang="en-US" sz="2300" b="1" dirty="0" smtClean="0"/>
+              <a:t>년</a:t>
+            </a:r>
+            <a:r>
+              <a:rPr lang="en-US" altLang="ko-KR" sz="2300" b="1" dirty="0" smtClean="0"/>
+              <a:t>)</a:t>
+            </a:r>
+            <a:endParaRPr lang="ko-KR" altLang="en-US" sz="2300" b="1" dirty="0"/>
+          </a:p>
+        </p:txBody>
+      </p:sp>
     </p:spTree>
     <p:extLst>
       <p:ext uri="{BB962C8B-B14F-4D97-AF65-F5344CB8AC3E}">
@@ -19717,7 +19739,6 @@
               <a:rPr lang="en-US" altLang="ko-KR" sz="1100" b="1" dirty="0" smtClean="0"/>
               <a:t>PC</a:t>
             </a:r>
-            <a:endParaRPr lang="en-US" altLang="ko-KR" sz="1100" b="1" dirty="0" smtClean="0"/>
           </a:p>
         </p:txBody>
       </p:sp>
@@ -19802,7 +19823,6 @@
               <a:rPr lang="en-US" altLang="ko-KR" sz="1100" b="1" dirty="0" smtClean="0"/>
               <a:t>PC</a:t>
             </a:r>
-            <a:endParaRPr lang="en-US" altLang="ko-KR" sz="1100" b="1" dirty="0" smtClean="0"/>
           </a:p>
         </p:txBody>
       </p:sp>
@@ -19887,7 +19907,6 @@
               <a:rPr lang="en-US" altLang="ko-KR" sz="1100" b="1" dirty="0" smtClean="0"/>
               <a:t>PC</a:t>
             </a:r>
-            <a:endParaRPr lang="en-US" altLang="ko-KR" sz="1100" b="1" dirty="0" smtClean="0"/>
           </a:p>
         </p:txBody>
       </p:sp>
@@ -19925,7 +19944,6 @@
               <a:rPr lang="ko-KR" altLang="en-US" dirty="0"/>
               <a:t>명</a:t>
             </a:r>
-            <a:endParaRPr lang="ko-KR" altLang="en-US" dirty="0"/>
           </a:p>
         </p:txBody>
       </p:sp>
@@ -20502,11 +20520,7 @@
             </a:r>
             <a:r>
               <a:rPr lang="ko-KR" altLang="en-US" sz="1500" dirty="0" smtClean="0"/>
-              <a:t> 전</a:t>
-            </a:r>
-            <a:r>
-              <a:rPr lang="ko-KR" altLang="en-US" sz="1500" dirty="0" smtClean="0"/>
-              <a:t>환</a:t>
+              <a:t> 전환</a:t>
             </a:r>
             <a:endParaRPr lang="ko-KR" altLang="en-US" sz="1500" dirty="0"/>
           </a:p>
@@ -22744,15 +22758,7 @@
             </a:r>
             <a:r>
               <a:rPr lang="ko-KR" altLang="en-US" dirty="0" smtClean="0"/>
-              <a:t>디스</a:t>
-            </a:r>
-            <a:r>
-              <a:rPr lang="ko-KR" altLang="en-US" dirty="0" smtClean="0"/>
-              <a:t>크</a:t>
-            </a:r>
-            <a:r>
-              <a:rPr lang="ko-KR" altLang="en-US" dirty="0" smtClean="0"/>
-              <a:t> 낭비</a:t>
+              <a:t>디스크 낭비</a:t>
             </a:r>
             <a:r>
               <a:rPr lang="en-US" altLang="ko-KR" dirty="0" smtClean="0"/>
@@ -23103,7 +23109,6 @@
               <a:rPr lang="en-US" altLang="ko-KR" sz="1500" b="1" dirty="0" smtClean="0"/>
               <a:t>HPA</a:t>
             </a:r>
-            <a:endParaRPr lang="en-US" altLang="ko-KR" sz="1500" b="1" dirty="0" smtClean="0"/>
           </a:p>
         </p:txBody>
       </p:sp>
@@ -25383,11 +25388,6 @@
               </a:rPr>
               <a:t>?</a:t>
             </a:r>
-            <a:endParaRPr lang="en-US" altLang="ko-KR" b="1" dirty="0" smtClean="0">
-              <a:solidFill>
-                <a:schemeClr val="tx1"/>
-              </a:solidFill>
-            </a:endParaRPr>
           </a:p>
         </p:txBody>
       </p:sp>
@@ -25453,11 +25453,7 @@
             </a:r>
             <a:r>
               <a:rPr lang="ko-KR" altLang="en-US" sz="1200" b="1" dirty="0" smtClean="0"/>
-              <a:t>개 추</a:t>
-            </a:r>
-            <a:r>
-              <a:rPr lang="ko-KR" altLang="en-US" sz="1200" b="1" dirty="0" smtClean="0"/>
-              <a:t>가</a:t>
+              <a:t>개 추가</a:t>
             </a:r>
             <a:endParaRPr lang="ko-KR" altLang="en-US" sz="1200" b="1" dirty="0"/>
           </a:p>
@@ -25765,7 +25761,6 @@
               <a:rPr lang="en-US" altLang="ko-KR" sz="1500" b="1" dirty="0" smtClean="0"/>
               <a:t>HPA</a:t>
             </a:r>
-            <a:endParaRPr lang="en-US" altLang="ko-KR" sz="1500" b="1" dirty="0" smtClean="0"/>
           </a:p>
         </p:txBody>
       </p:sp>
